--- a/deck/Nova_Showreel.pptx
+++ b/deck/Nova_Showreel.pptx
@@ -805,7 +805,7 @@
           <a:p>
             <a:r>
               <a:rPr lang="en-US" dirty="0"/>
-              <a:t>Opening. Nova is a banking assistant for a fictional bank, NexaBank. Everything that understands and generates language was built from scratch in this project. Add your name to this slide before presenting.</a:t>
+              <a:t>Opening. Nova is a banking assistant for a fictional bank, NexaBank. Everything that understands and generates language was built from scratch in this project. Team: Sahil Patel (RA2682242010223), Sanket Aepa (RA2682242010222), Devraj Soni (RA2682242010353).</a:t>
             </a:r>
             <a:endParaRPr lang="en-US" dirty="0"/>
           </a:p>
@@ -2573,7 +2573,7 @@
         </p:nvSpPr>
         <p:spPr>
           <a:xfrm>
-            <a:off x="640080" y="1874520"/>
+            <a:off x="640080" y="960120"/>
             <a:ext cx="6949440" cy="1097280"/>
           </a:xfrm>
           <a:prstGeom prst="rect">
@@ -2612,7 +2612,7 @@
         </p:nvSpPr>
         <p:spPr>
           <a:xfrm>
-            <a:off x="640080" y="3063240"/>
+            <a:off x="640080" y="2103120"/>
             <a:ext cx="6766560" cy="1005840"/>
           </a:xfrm>
           <a:prstGeom prst="rect">
@@ -2668,7 +2668,7 @@
         </p:nvSpPr>
         <p:spPr>
           <a:xfrm>
-            <a:off x="640080" y="4434840"/>
+            <a:off x="640080" y="3291840"/>
             <a:ext cx="6400800" cy="365760"/>
           </a:xfrm>
           <a:prstGeom prst="rect">
@@ -2696,6 +2696,360 @@
               <a:t>ILP mini project  ·  Banking domain  ·  2026</a:t>
             </a:r>
             <a:endParaRPr lang="en-US" sz="1500" dirty="0"/>
+          </a:p>
+        </p:txBody>
+      </p:sp>
+      <p:sp>
+        <p:nvSpPr>
+          <p:cNvPr id="8" name="obj_0_2"/>
+          <p:cNvSpPr txBox="1"/>
+          <p:nvPr/>
+        </p:nvSpPr>
+        <p:spPr>
+          <a:xfrm>
+            <a:off x="640080" y="4069080"/>
+            <a:ext cx="2743200" cy="320040"/>
+          </a:xfrm>
+          <a:prstGeom prst="rect">
+            <a:avLst/>
+          </a:prstGeom>
+          <a:noFill/>
+          <a:ln/>
+        </p:spPr>
+        <p:txBody>
+          <a:bodyPr wrap="square" lIns="0" tIns="0" rIns="0" bIns="0" rtlCol="0" anchor="t"/>
+          <a:lstStyle/>
+          <a:p>
+            <a:pPr indent="0" marL="0">
+              <a:buNone/>
+            </a:pPr>
+            <a:r>
+              <a:rPr lang="en-US" sz="1300" dirty="0">
+                <a:solidFill>
+                  <a:srgbClr val="8FAEB3"/>
+                </a:solidFill>
+                <a:latin typeface="Calibri" pitchFamily="34" charset="0"/>
+                <a:ea typeface="Calibri" pitchFamily="34" charset="-122"/>
+                <a:cs typeface="Calibri" pitchFamily="34" charset="-120"/>
+              </a:rPr>
+              <a:t>Team</a:t>
+            </a:r>
+            <a:endParaRPr lang="en-US" sz="1300" dirty="0"/>
+          </a:p>
+        </p:txBody>
+      </p:sp>
+      <p:sp>
+        <p:nvSpPr>
+          <p:cNvPr id="9" name="obj_0_3"/>
+          <p:cNvSpPr/>
+          <p:nvPr/>
+        </p:nvSpPr>
+        <p:spPr>
+          <a:xfrm>
+            <a:off x="640080" y="4480560"/>
+            <a:ext cx="5852160" cy="457200"/>
+          </a:xfrm>
+          <a:prstGeom prst="roundRect">
+            <a:avLst>
+              <a:gd name="adj" fmla="val 24000"/>
+            </a:avLst>
+          </a:prstGeom>
+          <a:solidFill>
+            <a:srgbClr val="0A3140"/>
+          </a:solidFill>
+          <a:ln w="12700">
+            <a:solidFill>
+              <a:srgbClr val="0C4555"/>
+            </a:solidFill>
+            <a:prstDash val="solid"/>
+          </a:ln>
+        </p:spPr>
+      </p:sp>
+      <p:sp>
+        <p:nvSpPr>
+          <p:cNvPr id="10" name="obj_0_4"/>
+          <p:cNvSpPr txBox="1"/>
+          <p:nvPr/>
+        </p:nvSpPr>
+        <p:spPr>
+          <a:xfrm>
+            <a:off x="868680" y="4480560"/>
+            <a:ext cx="3291840" cy="457200"/>
+          </a:xfrm>
+          <a:prstGeom prst="rect">
+            <a:avLst/>
+          </a:prstGeom>
+          <a:noFill/>
+          <a:ln/>
+        </p:spPr>
+        <p:txBody>
+          <a:bodyPr wrap="square" lIns="0" tIns="0" rIns="0" bIns="0" rtlCol="0" anchor="ctr"/>
+          <a:lstStyle/>
+          <a:p>
+            <a:pPr indent="0" marL="0">
+              <a:buNone/>
+            </a:pPr>
+            <a:r>
+              <a:rPr lang="en-US" sz="1600" b="1" dirty="0">
+                <a:solidFill>
+                  <a:srgbClr val="FFFFFF"/>
+                </a:solidFill>
+                <a:latin typeface="Arial" pitchFamily="34" charset="0"/>
+                <a:ea typeface="Arial" pitchFamily="34" charset="-122"/>
+                <a:cs typeface="Arial" pitchFamily="34" charset="-120"/>
+              </a:rPr>
+              <a:t>Sahil Patel</a:t>
+            </a:r>
+            <a:endParaRPr lang="en-US" sz="1600" dirty="0"/>
+          </a:p>
+        </p:txBody>
+      </p:sp>
+      <p:sp>
+        <p:nvSpPr>
+          <p:cNvPr id="11" name="obj_0_5"/>
+          <p:cNvSpPr txBox="1"/>
+          <p:nvPr/>
+        </p:nvSpPr>
+        <p:spPr>
+          <a:xfrm>
+            <a:off x="4023360" y="4480560"/>
+            <a:ext cx="2286000" cy="457200"/>
+          </a:xfrm>
+          <a:prstGeom prst="rect">
+            <a:avLst/>
+          </a:prstGeom>
+          <a:noFill/>
+          <a:ln/>
+        </p:spPr>
+        <p:txBody>
+          <a:bodyPr wrap="square" lIns="0" tIns="0" rIns="0" bIns="0" rtlCol="0" anchor="ctr"/>
+          <a:lstStyle/>
+          <a:p>
+            <a:pPr algn="r" indent="0" marL="0">
+              <a:buNone/>
+            </a:pPr>
+            <a:r>
+              <a:rPr lang="en-US" sz="1400" dirty="0">
+                <a:solidFill>
+                  <a:srgbClr val="7FCFCF"/>
+                </a:solidFill>
+                <a:latin typeface="Courier New" pitchFamily="34" charset="0"/>
+                <a:ea typeface="Courier New" pitchFamily="34" charset="-122"/>
+                <a:cs typeface="Courier New" pitchFamily="34" charset="-120"/>
+              </a:rPr>
+              <a:t>RA2682242010223</a:t>
+            </a:r>
+            <a:endParaRPr lang="en-US" sz="1400" dirty="0"/>
+          </a:p>
+        </p:txBody>
+      </p:sp>
+      <p:sp>
+        <p:nvSpPr>
+          <p:cNvPr id="12" name="obj_0_6"/>
+          <p:cNvSpPr/>
+          <p:nvPr/>
+        </p:nvSpPr>
+        <p:spPr>
+          <a:xfrm>
+            <a:off x="640080" y="5047488"/>
+            <a:ext cx="5852160" cy="457200"/>
+          </a:xfrm>
+          <a:prstGeom prst="roundRect">
+            <a:avLst>
+              <a:gd name="adj" fmla="val 24000"/>
+            </a:avLst>
+          </a:prstGeom>
+          <a:solidFill>
+            <a:srgbClr val="0A3140"/>
+          </a:solidFill>
+          <a:ln w="12700">
+            <a:solidFill>
+              <a:srgbClr val="0C4555"/>
+            </a:solidFill>
+            <a:prstDash val="solid"/>
+          </a:ln>
+        </p:spPr>
+      </p:sp>
+      <p:sp>
+        <p:nvSpPr>
+          <p:cNvPr id="13" name="obj_0_7"/>
+          <p:cNvSpPr txBox="1"/>
+          <p:nvPr/>
+        </p:nvSpPr>
+        <p:spPr>
+          <a:xfrm>
+            <a:off x="868680" y="5047488"/>
+            <a:ext cx="3291840" cy="457200"/>
+          </a:xfrm>
+          <a:prstGeom prst="rect">
+            <a:avLst/>
+          </a:prstGeom>
+          <a:noFill/>
+          <a:ln/>
+        </p:spPr>
+        <p:txBody>
+          <a:bodyPr wrap="square" lIns="0" tIns="0" rIns="0" bIns="0" rtlCol="0" anchor="ctr"/>
+          <a:lstStyle/>
+          <a:p>
+            <a:pPr indent="0" marL="0">
+              <a:buNone/>
+            </a:pPr>
+            <a:r>
+              <a:rPr lang="en-US" sz="1600" b="1" dirty="0">
+                <a:solidFill>
+                  <a:srgbClr val="FFFFFF"/>
+                </a:solidFill>
+                <a:latin typeface="Arial" pitchFamily="34" charset="0"/>
+                <a:ea typeface="Arial" pitchFamily="34" charset="-122"/>
+                <a:cs typeface="Arial" pitchFamily="34" charset="-120"/>
+              </a:rPr>
+              <a:t>Sanket Aepa</a:t>
+            </a:r>
+            <a:endParaRPr lang="en-US" sz="1600" dirty="0"/>
+          </a:p>
+        </p:txBody>
+      </p:sp>
+      <p:sp>
+        <p:nvSpPr>
+          <p:cNvPr id="14" name="obj_0_8"/>
+          <p:cNvSpPr txBox="1"/>
+          <p:nvPr/>
+        </p:nvSpPr>
+        <p:spPr>
+          <a:xfrm>
+            <a:off x="4023360" y="5047488"/>
+            <a:ext cx="2286000" cy="457200"/>
+          </a:xfrm>
+          <a:prstGeom prst="rect">
+            <a:avLst/>
+          </a:prstGeom>
+          <a:noFill/>
+          <a:ln/>
+        </p:spPr>
+        <p:txBody>
+          <a:bodyPr wrap="square" lIns="0" tIns="0" rIns="0" bIns="0" rtlCol="0" anchor="ctr"/>
+          <a:lstStyle/>
+          <a:p>
+            <a:pPr algn="r" indent="0" marL="0">
+              <a:buNone/>
+            </a:pPr>
+            <a:r>
+              <a:rPr lang="en-US" sz="1400" dirty="0">
+                <a:solidFill>
+                  <a:srgbClr val="7FCFCF"/>
+                </a:solidFill>
+                <a:latin typeface="Courier New" pitchFamily="34" charset="0"/>
+                <a:ea typeface="Courier New" pitchFamily="34" charset="-122"/>
+                <a:cs typeface="Courier New" pitchFamily="34" charset="-120"/>
+              </a:rPr>
+              <a:t>RA2682242010222</a:t>
+            </a:r>
+            <a:endParaRPr lang="en-US" sz="1400" dirty="0"/>
+          </a:p>
+        </p:txBody>
+      </p:sp>
+      <p:sp>
+        <p:nvSpPr>
+          <p:cNvPr id="15" name="obj_0_9"/>
+          <p:cNvSpPr/>
+          <p:nvPr/>
+        </p:nvSpPr>
+        <p:spPr>
+          <a:xfrm>
+            <a:off x="640080" y="5614416"/>
+            <a:ext cx="5852160" cy="457200"/>
+          </a:xfrm>
+          <a:prstGeom prst="roundRect">
+            <a:avLst>
+              <a:gd name="adj" fmla="val 24000"/>
+            </a:avLst>
+          </a:prstGeom>
+          <a:solidFill>
+            <a:srgbClr val="0A3140"/>
+          </a:solidFill>
+          <a:ln w="12700">
+            <a:solidFill>
+              <a:srgbClr val="0C4555"/>
+            </a:solidFill>
+            <a:prstDash val="solid"/>
+          </a:ln>
+        </p:spPr>
+      </p:sp>
+      <p:sp>
+        <p:nvSpPr>
+          <p:cNvPr id="16" name="obj_0_10"/>
+          <p:cNvSpPr txBox="1"/>
+          <p:nvPr/>
+        </p:nvSpPr>
+        <p:spPr>
+          <a:xfrm>
+            <a:off x="868680" y="5614416"/>
+            <a:ext cx="3291840" cy="457200"/>
+          </a:xfrm>
+          <a:prstGeom prst="rect">
+            <a:avLst/>
+          </a:prstGeom>
+          <a:noFill/>
+          <a:ln/>
+        </p:spPr>
+        <p:txBody>
+          <a:bodyPr wrap="square" lIns="0" tIns="0" rIns="0" bIns="0" rtlCol="0" anchor="ctr"/>
+          <a:lstStyle/>
+          <a:p>
+            <a:pPr indent="0" marL="0">
+              <a:buNone/>
+            </a:pPr>
+            <a:r>
+              <a:rPr lang="en-US" sz="1600" b="1" dirty="0">
+                <a:solidFill>
+                  <a:srgbClr val="FFFFFF"/>
+                </a:solidFill>
+                <a:latin typeface="Arial" pitchFamily="34" charset="0"/>
+                <a:ea typeface="Arial" pitchFamily="34" charset="-122"/>
+                <a:cs typeface="Arial" pitchFamily="34" charset="-120"/>
+              </a:rPr>
+              <a:t>Devraj Soni</a:t>
+            </a:r>
+            <a:endParaRPr lang="en-US" sz="1600" dirty="0"/>
+          </a:p>
+        </p:txBody>
+      </p:sp>
+      <p:sp>
+        <p:nvSpPr>
+          <p:cNvPr id="17" name="obj_0_11"/>
+          <p:cNvSpPr txBox="1"/>
+          <p:nvPr/>
+        </p:nvSpPr>
+        <p:spPr>
+          <a:xfrm>
+            <a:off x="4023360" y="5614416"/>
+            <a:ext cx="2286000" cy="457200"/>
+          </a:xfrm>
+          <a:prstGeom prst="rect">
+            <a:avLst/>
+          </a:prstGeom>
+          <a:noFill/>
+          <a:ln/>
+        </p:spPr>
+        <p:txBody>
+          <a:bodyPr wrap="square" lIns="0" tIns="0" rIns="0" bIns="0" rtlCol="0" anchor="ctr"/>
+          <a:lstStyle/>
+          <a:p>
+            <a:pPr algn="r" indent="0" marL="0">
+              <a:buNone/>
+            </a:pPr>
+            <a:r>
+              <a:rPr lang="en-US" sz="1400" dirty="0">
+                <a:solidFill>
+                  <a:srgbClr val="7FCFCF"/>
+                </a:solidFill>
+                <a:latin typeface="Courier New" pitchFamily="34" charset="0"/>
+                <a:ea typeface="Courier New" pitchFamily="34" charset="-122"/>
+                <a:cs typeface="Courier New" pitchFamily="34" charset="-120"/>
+              </a:rPr>
+              <a:t>RA2682242010353</a:t>
+            </a:r>
+            <a:endParaRPr lang="en-US" sz="1400" dirty="0"/>
           </a:p>
         </p:txBody>
       </p:sp>
@@ -2725,7 +3079,7 @@
                       </p:stCondLst>
                       <p:childTnLst>
                         <p:par>
-                          <p:cTn id="15" fill="hold">
+                          <p:cTn id="51" fill="hold">
                             <p:stCondLst>
                               <p:cond delay="0"/>
                             </p:stCondLst>
@@ -2875,6 +3229,494 @@
                                         <p:cTn id="13" dur="600"/>
                                         <p:tgtEl>
                                           <p:spTgt spid="7"/>
+                                        </p:tgtEl>
+                                      </p:cBhvr>
+                                    </p:animEffect>
+                                  </p:childTnLst>
+                                </p:cTn>
+                              </p:par>
+                              <p:par>
+                                <p:cTn id="15" presetID="10" presetClass="entr" presetSubtype="0" fill="hold" grpId="0" nodeType="withEffect">
+                                  <p:stCondLst>
+                                    <p:cond delay="1400"/>
+                                  </p:stCondLst>
+                                  <p:childTnLst>
+                                    <p:set>
+                                      <p:cBhvr>
+                                        <p:cTn id="17" dur="1" fill="hold">
+                                          <p:stCondLst>
+                                            <p:cond delay="0"/>
+                                          </p:stCondLst>
+                                        </p:cTn>
+                                        <p:tgtEl>
+                                          <p:spTgt spid="8"/>
+                                        </p:tgtEl>
+                                        <p:attrNameLst>
+                                          <p:attrName>style.visibility</p:attrName>
+                                        </p:attrNameLst>
+                                      </p:cBhvr>
+                                      <p:to>
+                                        <p:strVal val="visible"/>
+                                      </p:to>
+                                    </p:set>
+                                    <p:animEffect transition="in" filter="fade">
+                                      <p:cBhvr>
+                                        <p:cTn id="16" dur="600"/>
+                                        <p:tgtEl>
+                                          <p:spTgt spid="8"/>
+                                        </p:tgtEl>
+                                      </p:cBhvr>
+                                    </p:animEffect>
+                                  </p:childTnLst>
+                                </p:cTn>
+                              </p:par>
+                              <p:par>
+                                <p:cTn id="18" presetID="42" presetClass="entr" presetSubtype="0" fill="hold" grpId="0" nodeType="withEffect">
+                                  <p:stCondLst>
+                                    <p:cond delay="1550"/>
+                                  </p:stCondLst>
+                                  <p:childTnLst>
+                                    <p:set>
+                                      <p:cBhvr>
+                                        <p:cTn id="20" dur="1" fill="hold">
+                                          <p:stCondLst>
+                                            <p:cond delay="0"/>
+                                          </p:stCondLst>
+                                        </p:cTn>
+                                        <p:tgtEl>
+                                          <p:spTgt spid="9"/>
+                                        </p:tgtEl>
+                                        <p:attrNameLst>
+                                          <p:attrName>style.visibility</p:attrName>
+                                        </p:attrNameLst>
+                                      </p:cBhvr>
+                                      <p:to>
+                                        <p:strVal val="visible"/>
+                                      </p:to>
+                                    </p:set>
+                                    <p:animEffect transition="in" filter="fade">
+                                      <p:cBhvr>
+                                        <p:cTn id="19" dur="600"/>
+                                        <p:tgtEl>
+                                          <p:spTgt spid="9"/>
+                                        </p:tgtEl>
+                                      </p:cBhvr>
+                                    </p:animEffect>
+                                    <p:anim calcmode="lin" valueType="num">
+                                      <p:cBhvr additive="base">
+                                        <p:cTn id="21" dur="600" decel="100000" fill="hold"/>
+                                        <p:tgtEl>
+                                          <p:spTgt spid="9"/>
+                                        </p:tgtEl>
+                                        <p:attrNameLst>
+                                          <p:attrName>ppt_x</p:attrName>
+                                        </p:attrNameLst>
+                                      </p:cBhvr>
+                                      <p:tavLst>
+                                        <p:tav tm="0">
+                                          <p:val>
+                                            <p:strVal val="#ppt_x"/>
+                                          </p:val>
+                                        </p:tav>
+                                        <p:tav tm="100000">
+                                          <p:val>
+                                            <p:strVal val="#ppt_x"/>
+                                          </p:val>
+                                        </p:tav>
+                                      </p:tavLst>
+                                    </p:anim>
+                                    <p:anim calcmode="lin" valueType="num">
+                                      <p:cBhvr additive="base">
+                                        <p:cTn id="22" dur="600" decel="100000" fill="hold"/>
+                                        <p:tgtEl>
+                                          <p:spTgt spid="9"/>
+                                        </p:tgtEl>
+                                        <p:attrNameLst>
+                                          <p:attrName>ppt_y</p:attrName>
+                                        </p:attrNameLst>
+                                      </p:cBhvr>
+                                      <p:tavLst>
+                                        <p:tav tm="0">
+                                          <p:val>
+                                            <p:strVal val="#ppt_y+.1"/>
+                                          </p:val>
+                                        </p:tav>
+                                        <p:tav tm="100000">
+                                          <p:val>
+                                            <p:strVal val="#ppt_y"/>
+                                          </p:val>
+                                        </p:tav>
+                                      </p:tavLst>
+                                    </p:anim>
+                                  </p:childTnLst>
+                                </p:cTn>
+                              </p:par>
+                              <p:par>
+                                <p:cTn id="23" presetID="10" presetClass="entr" presetSubtype="0" fill="hold" grpId="0" nodeType="withEffect">
+                                  <p:stCondLst>
+                                    <p:cond delay="1600"/>
+                                  </p:stCondLst>
+                                  <p:childTnLst>
+                                    <p:set>
+                                      <p:cBhvr>
+                                        <p:cTn id="25" dur="1" fill="hold">
+                                          <p:stCondLst>
+                                            <p:cond delay="0"/>
+                                          </p:stCondLst>
+                                        </p:cTn>
+                                        <p:tgtEl>
+                                          <p:spTgt spid="10"/>
+                                        </p:tgtEl>
+                                        <p:attrNameLst>
+                                          <p:attrName>style.visibility</p:attrName>
+                                        </p:attrNameLst>
+                                      </p:cBhvr>
+                                      <p:to>
+                                        <p:strVal val="visible"/>
+                                      </p:to>
+                                    </p:set>
+                                    <p:animEffect transition="in" filter="fade">
+                                      <p:cBhvr>
+                                        <p:cTn id="24" dur="600"/>
+                                        <p:tgtEl>
+                                          <p:spTgt spid="10"/>
+                                        </p:tgtEl>
+                                      </p:cBhvr>
+                                    </p:animEffect>
+                                  </p:childTnLst>
+                                </p:cTn>
+                              </p:par>
+                              <p:par>
+                                <p:cTn id="26" presetID="10" presetClass="entr" presetSubtype="0" fill="hold" grpId="0" nodeType="withEffect">
+                                  <p:stCondLst>
+                                    <p:cond delay="1600"/>
+                                  </p:stCondLst>
+                                  <p:childTnLst>
+                                    <p:set>
+                                      <p:cBhvr>
+                                        <p:cTn id="28" dur="1" fill="hold">
+                                          <p:stCondLst>
+                                            <p:cond delay="0"/>
+                                          </p:stCondLst>
+                                        </p:cTn>
+                                        <p:tgtEl>
+                                          <p:spTgt spid="11"/>
+                                        </p:tgtEl>
+                                        <p:attrNameLst>
+                                          <p:attrName>style.visibility</p:attrName>
+                                        </p:attrNameLst>
+                                      </p:cBhvr>
+                                      <p:to>
+                                        <p:strVal val="visible"/>
+                                      </p:to>
+                                    </p:set>
+                                    <p:animEffect transition="in" filter="fade">
+                                      <p:cBhvr>
+                                        <p:cTn id="27" dur="600"/>
+                                        <p:tgtEl>
+                                          <p:spTgt spid="11"/>
+                                        </p:tgtEl>
+                                      </p:cBhvr>
+                                    </p:animEffect>
+                                  </p:childTnLst>
+                                </p:cTn>
+                              </p:par>
+                              <p:par>
+                                <p:cTn id="29" presetID="42" presetClass="entr" presetSubtype="0" fill="hold" grpId="0" nodeType="withEffect">
+                                  <p:stCondLst>
+                                    <p:cond delay="1730"/>
+                                  </p:stCondLst>
+                                  <p:childTnLst>
+                                    <p:set>
+                                      <p:cBhvr>
+                                        <p:cTn id="31" dur="1" fill="hold">
+                                          <p:stCondLst>
+                                            <p:cond delay="0"/>
+                                          </p:stCondLst>
+                                        </p:cTn>
+                                        <p:tgtEl>
+                                          <p:spTgt spid="12"/>
+                                        </p:tgtEl>
+                                        <p:attrNameLst>
+                                          <p:attrName>style.visibility</p:attrName>
+                                        </p:attrNameLst>
+                                      </p:cBhvr>
+                                      <p:to>
+                                        <p:strVal val="visible"/>
+                                      </p:to>
+                                    </p:set>
+                                    <p:animEffect transition="in" filter="fade">
+                                      <p:cBhvr>
+                                        <p:cTn id="30" dur="600"/>
+                                        <p:tgtEl>
+                                          <p:spTgt spid="12"/>
+                                        </p:tgtEl>
+                                      </p:cBhvr>
+                                    </p:animEffect>
+                                    <p:anim calcmode="lin" valueType="num">
+                                      <p:cBhvr additive="base">
+                                        <p:cTn id="32" dur="600" decel="100000" fill="hold"/>
+                                        <p:tgtEl>
+                                          <p:spTgt spid="12"/>
+                                        </p:tgtEl>
+                                        <p:attrNameLst>
+                                          <p:attrName>ppt_x</p:attrName>
+                                        </p:attrNameLst>
+                                      </p:cBhvr>
+                                      <p:tavLst>
+                                        <p:tav tm="0">
+                                          <p:val>
+                                            <p:strVal val="#ppt_x"/>
+                                          </p:val>
+                                        </p:tav>
+                                        <p:tav tm="100000">
+                                          <p:val>
+                                            <p:strVal val="#ppt_x"/>
+                                          </p:val>
+                                        </p:tav>
+                                      </p:tavLst>
+                                    </p:anim>
+                                    <p:anim calcmode="lin" valueType="num">
+                                      <p:cBhvr additive="base">
+                                        <p:cTn id="33" dur="600" decel="100000" fill="hold"/>
+                                        <p:tgtEl>
+                                          <p:spTgt spid="12"/>
+                                        </p:tgtEl>
+                                        <p:attrNameLst>
+                                          <p:attrName>ppt_y</p:attrName>
+                                        </p:attrNameLst>
+                                      </p:cBhvr>
+                                      <p:tavLst>
+                                        <p:tav tm="0">
+                                          <p:val>
+                                            <p:strVal val="#ppt_y+.1"/>
+                                          </p:val>
+                                        </p:tav>
+                                        <p:tav tm="100000">
+                                          <p:val>
+                                            <p:strVal val="#ppt_y"/>
+                                          </p:val>
+                                        </p:tav>
+                                      </p:tavLst>
+                                    </p:anim>
+                                  </p:childTnLst>
+                                </p:cTn>
+                              </p:par>
+                              <p:par>
+                                <p:cTn id="34" presetID="10" presetClass="entr" presetSubtype="0" fill="hold" grpId="0" nodeType="withEffect">
+                                  <p:stCondLst>
+                                    <p:cond delay="1780"/>
+                                  </p:stCondLst>
+                                  <p:childTnLst>
+                                    <p:set>
+                                      <p:cBhvr>
+                                        <p:cTn id="36" dur="1" fill="hold">
+                                          <p:stCondLst>
+                                            <p:cond delay="0"/>
+                                          </p:stCondLst>
+                                        </p:cTn>
+                                        <p:tgtEl>
+                                          <p:spTgt spid="13"/>
+                                        </p:tgtEl>
+                                        <p:attrNameLst>
+                                          <p:attrName>style.visibility</p:attrName>
+                                        </p:attrNameLst>
+                                      </p:cBhvr>
+                                      <p:to>
+                                        <p:strVal val="visible"/>
+                                      </p:to>
+                                    </p:set>
+                                    <p:animEffect transition="in" filter="fade">
+                                      <p:cBhvr>
+                                        <p:cTn id="35" dur="600"/>
+                                        <p:tgtEl>
+                                          <p:spTgt spid="13"/>
+                                        </p:tgtEl>
+                                      </p:cBhvr>
+                                    </p:animEffect>
+                                  </p:childTnLst>
+                                </p:cTn>
+                              </p:par>
+                              <p:par>
+                                <p:cTn id="37" presetID="10" presetClass="entr" presetSubtype="0" fill="hold" grpId="0" nodeType="withEffect">
+                                  <p:stCondLst>
+                                    <p:cond delay="1780"/>
+                                  </p:stCondLst>
+                                  <p:childTnLst>
+                                    <p:set>
+                                      <p:cBhvr>
+                                        <p:cTn id="39" dur="1" fill="hold">
+                                          <p:stCondLst>
+                                            <p:cond delay="0"/>
+                                          </p:stCondLst>
+                                        </p:cTn>
+                                        <p:tgtEl>
+                                          <p:spTgt spid="14"/>
+                                        </p:tgtEl>
+                                        <p:attrNameLst>
+                                          <p:attrName>style.visibility</p:attrName>
+                                        </p:attrNameLst>
+                                      </p:cBhvr>
+                                      <p:to>
+                                        <p:strVal val="visible"/>
+                                      </p:to>
+                                    </p:set>
+                                    <p:animEffect transition="in" filter="fade">
+                                      <p:cBhvr>
+                                        <p:cTn id="38" dur="600"/>
+                                        <p:tgtEl>
+                                          <p:spTgt spid="14"/>
+                                        </p:tgtEl>
+                                      </p:cBhvr>
+                                    </p:animEffect>
+                                  </p:childTnLst>
+                                </p:cTn>
+                              </p:par>
+                              <p:par>
+                                <p:cTn id="40" presetID="42" presetClass="entr" presetSubtype="0" fill="hold" grpId="0" nodeType="withEffect">
+                                  <p:stCondLst>
+                                    <p:cond delay="1910"/>
+                                  </p:stCondLst>
+                                  <p:childTnLst>
+                                    <p:set>
+                                      <p:cBhvr>
+                                        <p:cTn id="42" dur="1" fill="hold">
+                                          <p:stCondLst>
+                                            <p:cond delay="0"/>
+                                          </p:stCondLst>
+                                        </p:cTn>
+                                        <p:tgtEl>
+                                          <p:spTgt spid="15"/>
+                                        </p:tgtEl>
+                                        <p:attrNameLst>
+                                          <p:attrName>style.visibility</p:attrName>
+                                        </p:attrNameLst>
+                                      </p:cBhvr>
+                                      <p:to>
+                                        <p:strVal val="visible"/>
+                                      </p:to>
+                                    </p:set>
+                                    <p:animEffect transition="in" filter="fade">
+                                      <p:cBhvr>
+                                        <p:cTn id="41" dur="600"/>
+                                        <p:tgtEl>
+                                          <p:spTgt spid="15"/>
+                                        </p:tgtEl>
+                                      </p:cBhvr>
+                                    </p:animEffect>
+                                    <p:anim calcmode="lin" valueType="num">
+                                      <p:cBhvr additive="base">
+                                        <p:cTn id="43" dur="600" decel="100000" fill="hold"/>
+                                        <p:tgtEl>
+                                          <p:spTgt spid="15"/>
+                                        </p:tgtEl>
+                                        <p:attrNameLst>
+                                          <p:attrName>ppt_x</p:attrName>
+                                        </p:attrNameLst>
+                                      </p:cBhvr>
+                                      <p:tavLst>
+                                        <p:tav tm="0">
+                                          <p:val>
+                                            <p:strVal val="#ppt_x"/>
+                                          </p:val>
+                                        </p:tav>
+                                        <p:tav tm="100000">
+                                          <p:val>
+                                            <p:strVal val="#ppt_x"/>
+                                          </p:val>
+                                        </p:tav>
+                                      </p:tavLst>
+                                    </p:anim>
+                                    <p:anim calcmode="lin" valueType="num">
+                                      <p:cBhvr additive="base">
+                                        <p:cTn id="44" dur="600" decel="100000" fill="hold"/>
+                                        <p:tgtEl>
+                                          <p:spTgt spid="15"/>
+                                        </p:tgtEl>
+                                        <p:attrNameLst>
+                                          <p:attrName>ppt_y</p:attrName>
+                                        </p:attrNameLst>
+                                      </p:cBhvr>
+                                      <p:tavLst>
+                                        <p:tav tm="0">
+                                          <p:val>
+                                            <p:strVal val="#ppt_y+.1"/>
+                                          </p:val>
+                                        </p:tav>
+                                        <p:tav tm="100000">
+                                          <p:val>
+                                            <p:strVal val="#ppt_y"/>
+                                          </p:val>
+                                        </p:tav>
+                                      </p:tavLst>
+                                    </p:anim>
+                                  </p:childTnLst>
+                                </p:cTn>
+                              </p:par>
+                              <p:par>
+                                <p:cTn id="45" presetID="10" presetClass="entr" presetSubtype="0" fill="hold" grpId="0" nodeType="withEffect">
+                                  <p:stCondLst>
+                                    <p:cond delay="1960"/>
+                                  </p:stCondLst>
+                                  <p:childTnLst>
+                                    <p:set>
+                                      <p:cBhvr>
+                                        <p:cTn id="47" dur="1" fill="hold">
+                                          <p:stCondLst>
+                                            <p:cond delay="0"/>
+                                          </p:stCondLst>
+                                        </p:cTn>
+                                        <p:tgtEl>
+                                          <p:spTgt spid="16"/>
+                                        </p:tgtEl>
+                                        <p:attrNameLst>
+                                          <p:attrName>style.visibility</p:attrName>
+                                        </p:attrNameLst>
+                                      </p:cBhvr>
+                                      <p:to>
+                                        <p:strVal val="visible"/>
+                                      </p:to>
+                                    </p:set>
+                                    <p:animEffect transition="in" filter="fade">
+                                      <p:cBhvr>
+                                        <p:cTn id="46" dur="600"/>
+                                        <p:tgtEl>
+                                          <p:spTgt spid="16"/>
+                                        </p:tgtEl>
+                                      </p:cBhvr>
+                                    </p:animEffect>
+                                  </p:childTnLst>
+                                </p:cTn>
+                              </p:par>
+                              <p:par>
+                                <p:cTn id="48" presetID="10" presetClass="entr" presetSubtype="0" fill="hold" grpId="0" nodeType="withEffect">
+                                  <p:stCondLst>
+                                    <p:cond delay="1960"/>
+                                  </p:stCondLst>
+                                  <p:childTnLst>
+                                    <p:set>
+                                      <p:cBhvr>
+                                        <p:cTn id="50" dur="1" fill="hold">
+                                          <p:stCondLst>
+                                            <p:cond delay="0"/>
+                                          </p:stCondLst>
+                                        </p:cTn>
+                                        <p:tgtEl>
+                                          <p:spTgt spid="17"/>
+                                        </p:tgtEl>
+                                        <p:attrNameLst>
+                                          <p:attrName>style.visibility</p:attrName>
+                                        </p:attrNameLst>
+                                      </p:cBhvr>
+                                      <p:to>
+                                        <p:strVal val="visible"/>
+                                      </p:to>
+                                    </p:set>
+                                    <p:animEffect transition="in" filter="fade">
+                                      <p:cBhvr>
+                                        <p:cTn id="49" dur="600"/>
+                                        <p:tgtEl>
+                                          <p:spTgt spid="17"/>
                                         </p:tgtEl>
                                       </p:cBhvr>
                                     </p:animEffect>
@@ -2912,6 +3754,13 @@
       <p:bldP spid="5" grpId="0" animBg="1"/>
       <p:bldP spid="6" grpId="0" animBg="1"/>
       <p:bldP spid="7" grpId="0" animBg="1"/>
+      <p:bldP spid="8" grpId="0" animBg="1"/>
+      <p:bldP spid="10" grpId="0" animBg="1"/>
+      <p:bldP spid="11" grpId="0" animBg="1"/>
+      <p:bldP spid="13" grpId="0" animBg="1"/>
+      <p:bldP spid="14" grpId="0" animBg="1"/>
+      <p:bldP spid="16" grpId="0" animBg="1"/>
+      <p:bldP spid="17" grpId="0" animBg="1"/>
     </p:bldLst>
   </p:timing>
 </p:sld>
@@ -11355,7 +12204,7 @@
                 <a:ea typeface="Arial" pitchFamily="34" charset="-122"/>
                 <a:cs typeface="Arial" pitchFamily="34" charset="-120"/>
               </a:rPr>
-              <a:t>Stack and what I learned</a:t>
+              <a:t>Stack and what we learned</a:t>
             </a:r>
             <a:endParaRPr lang="en-US" sz="3400" dirty="0"/>
           </a:p>
@@ -15071,8 +15920,8 @@
         </p:nvSpPr>
         <p:spPr>
           <a:xfrm>
-            <a:off x="4678528" y="1176376"/>
-            <a:ext cx="2834640" cy="3316529"/>
+            <a:off x="4907128" y="1123798"/>
+            <a:ext cx="2377440" cy="2781605"/>
           </a:xfrm>
           <a:prstGeom prst="ellipse">
             <a:avLst/>
@@ -15091,8 +15940,8 @@
         </p:nvSpPr>
         <p:spPr>
           <a:xfrm>
-            <a:off x="5210023" y="1773351"/>
-            <a:ext cx="1771650" cy="2122578"/>
+            <a:off x="5352898" y="1624486"/>
+            <a:ext cx="1485900" cy="1780227"/>
           </a:xfrm>
           <a:prstGeom prst="ellipse">
             <a:avLst/>
@@ -15111,8 +15960,8 @@
         </p:nvSpPr>
         <p:spPr>
           <a:xfrm>
-            <a:off x="5670652" y="2602483"/>
-            <a:ext cx="850392" cy="1028124"/>
+            <a:off x="5739232" y="2319888"/>
+            <a:ext cx="713232" cy="862297"/>
           </a:xfrm>
           <a:prstGeom prst="ellipse">
             <a:avLst/>
@@ -15131,7 +15980,7 @@
         </p:nvSpPr>
         <p:spPr>
           <a:xfrm>
-            <a:off x="1371600" y="4617720"/>
+            <a:off x="1371600" y="4434840"/>
             <a:ext cx="9448495" cy="914400"/>
           </a:xfrm>
           <a:prstGeom prst="rect">
@@ -15170,8 +16019,8 @@
         </p:nvSpPr>
         <p:spPr>
           <a:xfrm>
-            <a:off x="1371600" y="5577840"/>
-            <a:ext cx="9448495" cy="411480"/>
+            <a:off x="1371600" y="5440680"/>
+            <a:ext cx="9448495" cy="365760"/>
           </a:xfrm>
           <a:prstGeom prst="rect">
             <a:avLst/>
@@ -15189,13 +16038,48 @@
             <a:r>
               <a:rPr lang="en-US" sz="1600" dirty="0">
                 <a:solidFill>
+                  <a:srgbClr val="8FAEB3"/>
+                </a:solidFill>
+                <a:latin typeface="Calibri" pitchFamily="34" charset="0"/>
+                <a:ea typeface="Calibri" pitchFamily="34" charset="-122"/>
+                <a:cs typeface="Calibri" pitchFamily="34" charset="-120"/>
+              </a:rPr>
+              <a:t>Live demo  </a:t>
+            </a:r>
+            <a:pPr algn="ctr" indent="0" marL="0">
+              <a:buNone/>
+            </a:pPr>
+            <a:r>
+              <a:rPr lang="en-US" sz="1600" u="sng" dirty="0">
+                <a:solidFill>
                   <a:srgbClr val="7FCFCF"/>
                 </a:solidFill>
                 <a:latin typeface="Calibri" pitchFamily="34" charset="0"/>
                 <a:ea typeface="Calibri" pitchFamily="34" charset="-122"/>
                 <a:cs typeface="Calibri" pitchFamily="34" charset="-120"/>
+                <a:hlinkClick r:id="rId2" invalidUrl="" action="" tgtFrame="" tooltip="" history="1" highlightClick="0" endSnd="0">
+                  <a:extLst>
+                    <a:ext uri="{A12FA001-AC4F-418D-AE19-62706E023703}">
+                      <ahyp:hlinkClr xmlns:ahyp="http://schemas.microsoft.com/office/drawing/2018/hyperlinkcolor" val="tx"/>
+                    </a:ext>
+                  </a:extLst>
+                </a:hlinkClick>
               </a:rPr>
-              <a:t>npm install  ·  npm run dev  ·  sign in with aarav@nexabank.demo</a:t>
+              <a:t>nexabank-gvyr.onrender.com</a:t>
+            </a:r>
+            <a:pPr algn="ctr" indent="0" marL="0">
+              <a:buNone/>
+            </a:pPr>
+            <a:r>
+              <a:rPr lang="en-US" sz="1600" dirty="0">
+                <a:solidFill>
+                  <a:srgbClr val="8FAEB3"/>
+                </a:solidFill>
+                <a:latin typeface="Calibri" pitchFamily="34" charset="0"/>
+                <a:ea typeface="Calibri" pitchFamily="34" charset="-122"/>
+                <a:cs typeface="Calibri" pitchFamily="34" charset="-120"/>
+              </a:rPr>
+              <a:t>  ·  aarav@nexabank.demo / Nova@123</a:t>
             </a:r>
             <a:endParaRPr lang="en-US" sz="1600" dirty="0"/>
           </a:p>
@@ -15209,8 +16093,47 @@
         </p:nvSpPr>
         <p:spPr>
           <a:xfrm>
-            <a:off x="1371600" y="6035040"/>
-            <a:ext cx="9448495" cy="365760"/>
+            <a:off x="1371600" y="5897880"/>
+            <a:ext cx="9448495" cy="320040"/>
+          </a:xfrm>
+          <a:prstGeom prst="rect">
+            <a:avLst/>
+          </a:prstGeom>
+          <a:noFill/>
+          <a:ln/>
+        </p:spPr>
+        <p:txBody>
+          <a:bodyPr wrap="square" lIns="0" tIns="0" rIns="0" bIns="0" rtlCol="0" anchor="t"/>
+          <a:lstStyle/>
+          <a:p>
+            <a:pPr algn="ctr" indent="0" marL="0">
+              <a:buNone/>
+            </a:pPr>
+            <a:r>
+              <a:rPr lang="en-US" sz="1400" dirty="0">
+                <a:solidFill>
+                  <a:srgbClr val="CFE3E4"/>
+                </a:solidFill>
+                <a:latin typeface="Calibri" pitchFamily="34" charset="0"/>
+                <a:ea typeface="Calibri" pitchFamily="34" charset="-122"/>
+                <a:cs typeface="Calibri" pitchFamily="34" charset="-120"/>
+              </a:rPr>
+              <a:t>Sahil Patel   ·   Sanket Aepa   ·   Devraj Soni</a:t>
+            </a:r>
+            <a:endParaRPr lang="en-US" sz="1400" dirty="0"/>
+          </a:p>
+        </p:txBody>
+      </p:sp>
+      <p:sp>
+        <p:nvSpPr>
+          <p:cNvPr id="8" name="obj_15_2"/>
+          <p:cNvSpPr txBox="1"/>
+          <p:nvPr/>
+        </p:nvSpPr>
+        <p:spPr>
+          <a:xfrm>
+            <a:off x="1371600" y="6263640"/>
+            <a:ext cx="9448495" cy="320040"/>
           </a:xfrm>
           <a:prstGeom prst="rect">
             <a:avLst/>
@@ -15275,7 +16198,7 @@
                       </p:stCondLst>
                       <p:childTnLst>
                         <p:par>
-                          <p:cTn id="10" fill="hold">
+                          <p:cTn id="13" fill="hold">
                             <p:stCondLst>
                               <p:cond delay="0"/>
                             </p:stCondLst>
@@ -15318,7 +16241,7 @@
                               <p:par>
                                 <p:cTn id="7" presetID="10" presetClass="entr" presetSubtype="0" fill="hold" grpId="0" nodeType="withEffect">
                                   <p:stCondLst>
-                                    <p:cond delay="1300"/>
+                                    <p:cond delay="1200"/>
                                   </p:stCondLst>
                                   <p:childTnLst>
                                     <p:set>
@@ -15344,6 +16267,41 @@
                                         <p:cTn id="8" dur="600"/>
                                         <p:tgtEl>
                                           <p:spTgt spid="7"/>
+                                        </p:tgtEl>
+                                      </p:cBhvr>
+                                    </p:animEffect>
+                                  </p:childTnLst>
+                                </p:cTn>
+                              </p:par>
+                              <p:par>
+                                <p:cTn id="10" presetID="10" presetClass="entr" presetSubtype="0" fill="hold" grpId="0" nodeType="withEffect">
+                                  <p:stCondLst>
+                                    <p:cond delay="1400"/>
+                                  </p:stCondLst>
+                                  <p:childTnLst>
+                                    <p:set>
+                                      <p:cBhvr>
+                                        <p:cTn id="12" dur="1" fill="hold">
+                                          <p:stCondLst>
+                                            <p:cond delay="0"/>
+                                          </p:stCondLst>
+                                        </p:cTn>
+                                        <p:tgtEl>
+                                          <p:spTgt spid="8"/>
+                                        </p:tgtEl>
+                                        <p:attrNameLst>
+                                          <p:attrName>style.visibility</p:attrName>
+                                        </p:attrNameLst>
+                                      </p:cBhvr>
+                                      <p:to>
+                                        <p:strVal val="visible"/>
+                                      </p:to>
+                                    </p:set>
+                                    <p:animEffect transition="in" filter="fade">
+                                      <p:cBhvr>
+                                        <p:cTn id="11" dur="600"/>
+                                        <p:tgtEl>
+                                          <p:spTgt spid="8"/>
                                         </p:tgtEl>
                                       </p:cBhvr>
                                     </p:animEffect>
@@ -15380,6 +16338,7 @@
     <p:bldLst>
       <p:bldP spid="6" grpId="0" animBg="1"/>
       <p:bldP spid="7" grpId="0" animBg="1"/>
+      <p:bldP spid="8" grpId="0" animBg="1"/>
     </p:bldLst>
   </p:timing>
 </p:sld>
